--- a/curso/pptx/S53.pptx
+++ b/curso/pptx/S53.pptx
@@ -5151,7 +5151,7 @@
                 </a:solidFill>
                 <a:latin typeface="Nunito Sans"/>
               </a:rPr>
-              <a:t>Buscar yo lo que quiero ver, no solo mirar lo que me sale.</a:t>
+              <a:t>自己去找想看的内容，而不是只看推送给我的。</a:t>
             </a:r>
           </a:p>
           <a:p>
@@ -5176,7 +5176,7 @@
                 </a:solidFill>
                 <a:latin typeface="Nunito Sans"/>
               </a:rPr>
-              <a:t>Seguir fuentes que piensen distinto.</a:t>
+              <a:t>关注想法不同的来源。</a:t>
             </a:r>
           </a:p>
           <a:p>
@@ -5201,7 +5201,7 @@
                 </a:solidFill>
                 <a:latin typeface="Nunito Sans"/>
               </a:rPr>
-              <a:t>Pulsar «no me interesa» en lo que no quiero ver.</a:t>
+              <a:t>对不想看的内容点“不感兴趣”。</a:t>
             </a:r>
           </a:p>
           <a:p>
@@ -5226,7 +5226,7 @@
                 </a:solidFill>
                 <a:latin typeface="Nunito Sans"/>
               </a:rPr>
-              <a:t>Recordar: mi pantalla no es el mundo.</a:t>
+              <a:t>记住：我的屏幕不是世界。</a:t>
             </a:r>
           </a:p>
         </p:txBody>
@@ -7011,7 +7011,7 @@
                 </a:solidFill>
                 <a:latin typeface="Nunito Sans"/>
               </a:rPr>
-              <a:t>Mira qué ves, cuánto tiempo y qué te gusta</a:t>
+              <a:t>它看你看了什么、看了多久、喜欢什么</a:t>
             </a:r>
           </a:p>
           <a:p>
@@ -7036,7 +7036,7 @@
                 </a:solidFill>
                 <a:latin typeface="Nunito Sans"/>
               </a:rPr>
-              <a:t>Te enseña más de lo que te engancha</a:t>
+              <a:t>它给你看更多让你上瘾的内容</a:t>
             </a:r>
           </a:p>
           <a:p>
@@ -7061,7 +7061,7 @@
                 </a:solidFill>
                 <a:latin typeface="Nunito Sans"/>
               </a:rPr>
-              <a:t>No busca la verdad: busca, sobre todo, que sigas mirando</a:t>
+              <a:t>它不追求真相：它最主要的目的是让你一直看下去</a:t>
             </a:r>
           </a:p>
         </p:txBody>
@@ -7295,7 +7295,7 @@
                 </a:solidFill>
                 <a:latin typeface="Nunito Sans"/>
               </a:rPr>
-              <a:t>Idea que hizo famosa el activista Eli Pariser en 2011</a:t>
+              <a:t>这一想法因活动家伊莱·帕里泽（Eli Pariser）在2011年而出名</a:t>
             </a:r>
           </a:p>
           <a:p>
@@ -7320,7 +7320,7 @@
                 </a:solidFill>
                 <a:latin typeface="Nunito Sans"/>
               </a:rPr>
-              <a:t>Desde dentro no se ve: parece que el mundo es así</a:t>
+              <a:t>从里面看不出来：你会觉得世界就是这个样子</a:t>
             </a:r>
           </a:p>
           <a:p>
@@ -7345,7 +7345,7 @@
                 </a:solidFill>
                 <a:latin typeface="Nunito Sans"/>
               </a:rPr>
-              <a:t>Se junta con el sesgo de confirmación （第44课）</a:t>
+              <a:t>它和确认偏见（第44课）结合在一起</a:t>
             </a:r>
           </a:p>
           <a:p>
@@ -7370,7 +7370,7 @@
                 </a:solidFill>
                 <a:latin typeface="Nunito Sans"/>
               </a:rPr>
-              <a:t>Ojo: muchos estudios la ven menos cerrada de lo que se temía</a:t>
+              <a:t>注意：很多研究发现它没有人们担心的那么封闭</a:t>
             </a:r>
           </a:p>
         </p:txBody>
@@ -7604,7 +7604,7 @@
                 </a:solidFill>
                 <a:latin typeface="Nunito Sans"/>
               </a:rPr>
-              <a:t>«Todo el mundo piensa como yo»</a:t>
+              <a:t>“所有人都和我想的一样”</a:t>
             </a:r>
           </a:p>
           <a:p>
@@ -7629,7 +7629,7 @@
                 </a:solidFill>
                 <a:latin typeface="Nunito Sans"/>
               </a:rPr>
-              <a:t>«Solo hay una forma de verlo»</a:t>
+              <a:t>“只有一种看法”</a:t>
             </a:r>
           </a:p>
           <a:p>
@@ -7654,7 +7654,7 @@
                 </a:solidFill>
                 <a:latin typeface="Nunito Sans"/>
               </a:rPr>
-              <a:t>«Lo que no me sale no existe»</a:t>
+              <a:t>“我看不到的就不存在”</a:t>
             </a:r>
           </a:p>
         </p:txBody>
@@ -7784,7 +7784,7 @@
                 </a:solidFill>
                 <a:latin typeface="Nunito Sans"/>
               </a:rPr>
-              <a:t>Hay mucha gente que piensa distinto</a:t>
+              <a:t>有很多人想法不同</a:t>
             </a:r>
           </a:p>
           <a:p>
@@ -7809,7 +7809,7 @@
                 </a:solidFill>
                 <a:latin typeface="Nunito Sans"/>
               </a:rPr>
-              <a:t>Cada persona ve una pantalla diferente</a:t>
+              <a:t>每个人看到的屏幕都不一样</a:t>
             </a:r>
           </a:p>
           <a:p>
@@ -7834,7 +7834,7 @@
                 </a:solidFill>
                 <a:latin typeface="Nunito Sans"/>
               </a:rPr>
-              <a:t>Hay mucho que el algoritmo no me enseña</a:t>
+              <a:t>有很多东西算法不会给我看</a:t>
             </a:r>
           </a:p>
         </p:txBody>

--- a/curso/pptx/S53.pptx
+++ b/curso/pptx/S53.pptx
@@ -4047,7 +4047,7 @@
                 </a:solidFill>
                 <a:latin typeface="Fredoka"/>
               </a:rPr>
-              <a:t>案例1 · 伊克尔和他的妹妹</a:t>
+              <a:t>案例1 · 一个男孩和他的妹妹</a:t>
             </a:r>
           </a:p>
         </p:txBody>
@@ -4129,7 +4129,7 @@
                 </a:solidFill>
                 <a:latin typeface="Nunito Sans"/>
               </a:rPr>
-              <a:t>两人都在油管上搜索“毕尔巴鄂竞技”。伊克尔看到的是进球集锦。他的妹妹看到的是采访和女子足球。</a:t>
+              <a:t>两人都在油管上搜索“毕尔巴鄂竞技”。一个男孩看到的是进球集锦。他的妹妹看到的是采访和女子足球。</a:t>
             </a:r>
           </a:p>
         </p:txBody>
@@ -4202,7 +4202,7 @@
                 </a:solidFill>
                 <a:latin typeface="Nunito Sans"/>
               </a:rPr>
-              <a:t>它给伊克尔看进球，因为这是他看得最多的。</a:t>
+              <a:t>它给这个男孩看进球，因为这是他看得最多的。</a:t>
             </a:r>
           </a:p>
           <a:p>
@@ -4438,7 +4438,7 @@
                 </a:solidFill>
                 <a:latin typeface="Nunito Sans"/>
               </a:rPr>
-              <a:t>蕾蕾（Leire）看了两个人们吵架的视频。第二天，她看到了更多吵架的视频。</a:t>
+              <a:t>一个女孩看了两个人们吵架的视频。第二天，她看到了更多吵架的视频。</a:t>
             </a:r>
           </a:p>
         </p:txBody>
@@ -4536,7 +4536,7 @@
                 </a:solidFill>
                 <a:latin typeface="Nunito Sans"/>
               </a:rPr>
-              <a:t>蕾蕾最后可能会以为所有人都在生气。</a:t>
+              <a:t>这个女孩最后可能会以为所有人都在生气。</a:t>
             </a:r>
           </a:p>
           <a:p>
@@ -4561,7 +4561,7 @@
                 </a:solidFill>
                 <a:latin typeface="Nunito Sans"/>
               </a:rPr>
-              <a:t>结论：算法想让她继续看下去。蕾蕾看到的是一种挑选，而不是世界。</a:t>
+              <a:t>结论：算法想让她继续看下去。这个女孩看到的是一种挑选，而不是世界。</a:t>
             </a:r>
           </a:p>
         </p:txBody>
@@ -4747,7 +4747,7 @@
                 </a:solidFill>
                 <a:latin typeface="Nunito Sans"/>
               </a:rPr>
-              <a:t>迪伦（Dylan）：“我陷在茧房里都怪抖音。”可是他只关注想法和他一样的账号，还屏蔽了其他人。</a:t>
+              <a:t>一个男孩：“我陷在茧房里都怪抖音。”可是他只关注想法和他一样的账号，还屏蔽了其他人。</a:t>
             </a:r>
           </a:p>
         </p:txBody>
@@ -6634,7 +6634,7 @@
                 </a:solidFill>
                 <a:latin typeface="Nunito Sans"/>
               </a:rPr>
-              <a:t>伊克尔和他的妹妹同时在油管上搜索“毕尔巴鄂竞技”。伊克尔看到的是进球集锦。她看到的是采访和女子足球。关键词是一样的。</a:t>
+              <a:t>一个男孩和他的妹妹同时在油管上搜索“毕尔巴鄂竞技”。这个男孩看到的是进球集锦。她看到的是采访和女子足球。关键词是一样的。</a:t>
             </a:r>
           </a:p>
         </p:txBody>
